--- a/作业常见问题.pptx
+++ b/作业常见问题.pptx
@@ -6,8 +6,9 @@
   </p:sldMasterIdLst>
   <p:sldIdLst>
     <p:sldId id="256" r:id="rId2"/>
-    <p:sldId id="258" r:id="rId3"/>
-    <p:sldId id="259" r:id="rId4"/>
+    <p:sldId id="260" r:id="rId3"/>
+    <p:sldId id="258" r:id="rId4"/>
+    <p:sldId id="259" r:id="rId5"/>
   </p:sldIdLst>
   <p:sldSz cx="12192000" cy="6858000"/>
   <p:notesSz cx="6858000" cy="9144000"/>
@@ -106,6 +107,11 @@
       </a:defRPr>
     </a:lvl9pPr>
   </p:defaultTextStyle>
+  <p:extLst>
+    <p:ext uri="{EFAFB233-063F-42B5-8137-9DF3F51BA10A}">
+      <p15:sldGuideLst xmlns:p15="http://schemas.microsoft.com/office/powerpoint/2012/main"/>
+    </p:ext>
+  </p:extLst>
 </p:presentation>
 </file>
 
@@ -258,7 +264,7 @@
           <a:p>
             <a:fld id="{15EB949F-490C-F74D-BE47-62A8B982FFDF}" type="datetimeFigureOut">
               <a:rPr lang="en-CN" smtClean="0"/>
-              <a:t>2023/9/25</a:t>
+              <a:t>2025/10/29</a:t>
             </a:fld>
             <a:endParaRPr lang="en-CN"/>
           </a:p>
@@ -458,7 +464,7 @@
           <a:p>
             <a:fld id="{15EB949F-490C-F74D-BE47-62A8B982FFDF}" type="datetimeFigureOut">
               <a:rPr lang="en-CN" smtClean="0"/>
-              <a:t>2023/9/25</a:t>
+              <a:t>2025/10/29</a:t>
             </a:fld>
             <a:endParaRPr lang="en-CN"/>
           </a:p>
@@ -668,7 +674,7 @@
           <a:p>
             <a:fld id="{15EB949F-490C-F74D-BE47-62A8B982FFDF}" type="datetimeFigureOut">
               <a:rPr lang="en-CN" smtClean="0"/>
-              <a:t>2023/9/25</a:t>
+              <a:t>2025/10/29</a:t>
             </a:fld>
             <a:endParaRPr lang="en-CN"/>
           </a:p>
@@ -868,7 +874,7 @@
           <a:p>
             <a:fld id="{15EB949F-490C-F74D-BE47-62A8B982FFDF}" type="datetimeFigureOut">
               <a:rPr lang="en-CN" smtClean="0"/>
-              <a:t>2023/9/25</a:t>
+              <a:t>2025/10/29</a:t>
             </a:fld>
             <a:endParaRPr lang="en-CN"/>
           </a:p>
@@ -1144,7 +1150,7 @@
           <a:p>
             <a:fld id="{15EB949F-490C-F74D-BE47-62A8B982FFDF}" type="datetimeFigureOut">
               <a:rPr lang="en-CN" smtClean="0"/>
-              <a:t>2023/9/25</a:t>
+              <a:t>2025/10/29</a:t>
             </a:fld>
             <a:endParaRPr lang="en-CN"/>
           </a:p>
@@ -1412,7 +1418,7 @@
           <a:p>
             <a:fld id="{15EB949F-490C-F74D-BE47-62A8B982FFDF}" type="datetimeFigureOut">
               <a:rPr lang="en-CN" smtClean="0"/>
-              <a:t>2023/9/25</a:t>
+              <a:t>2025/10/29</a:t>
             </a:fld>
             <a:endParaRPr lang="en-CN"/>
           </a:p>
@@ -1827,7 +1833,7 @@
           <a:p>
             <a:fld id="{15EB949F-490C-F74D-BE47-62A8B982FFDF}" type="datetimeFigureOut">
               <a:rPr lang="en-CN" smtClean="0"/>
-              <a:t>2023/9/25</a:t>
+              <a:t>2025/10/29</a:t>
             </a:fld>
             <a:endParaRPr lang="en-CN"/>
           </a:p>
@@ -1969,7 +1975,7 @@
           <a:p>
             <a:fld id="{15EB949F-490C-F74D-BE47-62A8B982FFDF}" type="datetimeFigureOut">
               <a:rPr lang="en-CN" smtClean="0"/>
-              <a:t>2023/9/25</a:t>
+              <a:t>2025/10/29</a:t>
             </a:fld>
             <a:endParaRPr lang="en-CN"/>
           </a:p>
@@ -2082,7 +2088,7 @@
           <a:p>
             <a:fld id="{15EB949F-490C-F74D-BE47-62A8B982FFDF}" type="datetimeFigureOut">
               <a:rPr lang="en-CN" smtClean="0"/>
-              <a:t>2023/9/25</a:t>
+              <a:t>2025/10/29</a:t>
             </a:fld>
             <a:endParaRPr lang="en-CN"/>
           </a:p>
@@ -2395,7 +2401,7 @@
           <a:p>
             <a:fld id="{15EB949F-490C-F74D-BE47-62A8B982FFDF}" type="datetimeFigureOut">
               <a:rPr lang="en-CN" smtClean="0"/>
-              <a:t>2023/9/25</a:t>
+              <a:t>2025/10/29</a:t>
             </a:fld>
             <a:endParaRPr lang="en-CN"/>
           </a:p>
@@ -2684,7 +2690,7 @@
           <a:p>
             <a:fld id="{15EB949F-490C-F74D-BE47-62A8B982FFDF}" type="datetimeFigureOut">
               <a:rPr lang="en-CN" smtClean="0"/>
-              <a:t>2023/9/25</a:t>
+              <a:t>2025/10/29</a:t>
             </a:fld>
             <a:endParaRPr lang="en-CN"/>
           </a:p>
@@ -2927,7 +2933,7 @@
           <a:p>
             <a:fld id="{15EB949F-490C-F74D-BE47-62A8B982FFDF}" type="datetimeFigureOut">
               <a:rPr lang="en-CN" smtClean="0"/>
-              <a:t>2023/9/25</a:t>
+              <a:t>2025/10/29</a:t>
             </a:fld>
             <a:endParaRPr lang="en-CN"/>
           </a:p>
@@ -3424,6 +3430,344 @@
           <a:chExt cx="0" cy="0"/>
         </a:xfrm>
       </p:grpSpPr>
+      <p:pic>
+        <p:nvPicPr>
+          <p:cNvPr id="3" name="Picture 2">
+            <a:extLst>
+              <a:ext uri="{FF2B5EF4-FFF2-40B4-BE49-F238E27FC236}">
+                <a16:creationId xmlns:a16="http://schemas.microsoft.com/office/drawing/2014/main" id="{FC141857-0AB0-93B6-4CDC-3F444617D81F}"/>
+              </a:ext>
+            </a:extLst>
+          </p:cNvPr>
+          <p:cNvPicPr>
+            <a:picLocks noChangeAspect="1"/>
+          </p:cNvPicPr>
+          <p:nvPr/>
+        </p:nvPicPr>
+        <p:blipFill>
+          <a:blip r:embed="rId2"/>
+          <a:stretch>
+            <a:fillRect/>
+          </a:stretch>
+        </p:blipFill>
+        <p:spPr>
+          <a:xfrm>
+            <a:off x="112563" y="76936"/>
+            <a:ext cx="8657932" cy="2862322"/>
+          </a:xfrm>
+          <a:prstGeom prst="rect">
+            <a:avLst/>
+          </a:prstGeom>
+        </p:spPr>
+      </p:pic>
+      <p:sp>
+        <p:nvSpPr>
+          <p:cNvPr id="4" name="TextBox 3">
+            <a:extLst>
+              <a:ext uri="{FF2B5EF4-FFF2-40B4-BE49-F238E27FC236}">
+                <a16:creationId xmlns:a16="http://schemas.microsoft.com/office/drawing/2014/main" id="{E809A02C-70BB-576F-2578-B4E60628B41E}"/>
+              </a:ext>
+            </a:extLst>
+          </p:cNvPr>
+          <p:cNvSpPr txBox="1"/>
+          <p:nvPr/>
+        </p:nvSpPr>
+        <p:spPr>
+          <a:xfrm>
+            <a:off x="82403" y="3009014"/>
+            <a:ext cx="4298806" cy="2862322"/>
+          </a:xfrm>
+          <a:prstGeom prst="rect">
+            <a:avLst/>
+          </a:prstGeom>
+          <a:noFill/>
+        </p:spPr>
+        <p:txBody>
+          <a:bodyPr wrap="none" rtlCol="0">
+            <a:spAutoFit/>
+          </a:bodyPr>
+          <a:lstStyle/>
+          <a:p>
+            <a:r>
+              <a:rPr lang="en-CN" dirty="0"/>
+              <a:t>编译时如果出现版本不匹配问题</a:t>
+            </a:r>
+            <a:r>
+              <a:rPr lang="zh-CN" altLang="en-US" dirty="0"/>
+              <a:t>：</a:t>
+            </a:r>
+            <a:endParaRPr lang="en-US" altLang="zh-CN" dirty="0"/>
+          </a:p>
+          <a:p>
+            <a:r>
+              <a:rPr lang="zh-CN" altLang="en-US" dirty="0"/>
+              <a:t>可运行：</a:t>
+            </a:r>
+            <a:endParaRPr lang="en-US" altLang="zh-CN" dirty="0"/>
+          </a:p>
+          <a:p>
+            <a:endParaRPr lang="en-US" dirty="0"/>
+          </a:p>
+          <a:p>
+            <a:r>
+              <a:rPr lang="en-US" altLang="ja-JP" dirty="0"/>
+              <a:t># </a:t>
+            </a:r>
+            <a:r>
+              <a:rPr lang="ja-JP" altLang="en-US"/>
+              <a:t>更新</a:t>
+            </a:r>
+            <a:r>
+              <a:rPr lang="en-US" dirty="0" err="1"/>
+              <a:t>TinyTeX</a:t>
+            </a:r>
+            <a:r>
+              <a:rPr lang="ja-JP" altLang="en-US"/>
+              <a:t>到最新版本</a:t>
+            </a:r>
+          </a:p>
+          <a:p>
+            <a:r>
+              <a:rPr lang="en-US" dirty="0" err="1"/>
+              <a:t>tinytex</a:t>
+            </a:r>
+            <a:r>
+              <a:rPr lang="en-US" dirty="0"/>
+              <a:t>::</a:t>
+            </a:r>
+            <a:r>
+              <a:rPr lang="en-US" dirty="0" err="1"/>
+              <a:t>update_tinytex</a:t>
+            </a:r>
+            <a:r>
+              <a:rPr lang="en-US" dirty="0"/>
+              <a:t>()</a:t>
+            </a:r>
+          </a:p>
+          <a:p>
+            <a:endParaRPr lang="en-US" dirty="0"/>
+          </a:p>
+          <a:p>
+            <a:r>
+              <a:rPr lang="en-US" dirty="0"/>
+              <a:t># </a:t>
+            </a:r>
+            <a:r>
+              <a:rPr lang="ja-JP" altLang="en-US"/>
+              <a:t>若更新后仍报错，尝试重新安装</a:t>
+            </a:r>
+            <a:r>
+              <a:rPr lang="en-US" dirty="0" err="1"/>
+              <a:t>TinyTeX</a:t>
+            </a:r>
+            <a:endParaRPr lang="en-US" dirty="0"/>
+          </a:p>
+          <a:p>
+            <a:r>
+              <a:rPr lang="en-US" dirty="0" err="1"/>
+              <a:t>tinytex</a:t>
+            </a:r>
+            <a:r>
+              <a:rPr lang="en-US" dirty="0"/>
+              <a:t>::</a:t>
+            </a:r>
+            <a:r>
+              <a:rPr lang="en-US" dirty="0" err="1"/>
+              <a:t>reinstall_tinytex</a:t>
+            </a:r>
+            <a:r>
+              <a:rPr lang="en-US" dirty="0"/>
+              <a:t>()</a:t>
+            </a:r>
+          </a:p>
+          <a:p>
+            <a:endParaRPr lang="en-US" dirty="0"/>
+          </a:p>
+          <a:p>
+            <a:r>
+              <a:rPr lang="en-US" dirty="0" err="1"/>
+              <a:t>等</a:t>
+            </a:r>
+            <a:r>
+              <a:rPr lang="zh-CN" altLang="en-US" dirty="0"/>
+              <a:t> </a:t>
+            </a:r>
+            <a:r>
+              <a:rPr lang="en-US" altLang="zh-CN" dirty="0" err="1"/>
+              <a:t>tlmgr</a:t>
+            </a:r>
+            <a:r>
+              <a:rPr lang="zh-CN" altLang="en-US" dirty="0"/>
+              <a:t> 更新完包后，再重新编译</a:t>
+            </a:r>
+            <a:endParaRPr lang="en-CN" dirty="0"/>
+          </a:p>
+        </p:txBody>
+      </p:sp>
+      <p:sp>
+        <p:nvSpPr>
+          <p:cNvPr id="6" name="TextBox 5">
+            <a:extLst>
+              <a:ext uri="{FF2B5EF4-FFF2-40B4-BE49-F238E27FC236}">
+                <a16:creationId xmlns:a16="http://schemas.microsoft.com/office/drawing/2014/main" id="{23B19F3A-390D-CED0-9F5F-EA31CD8AFF0C}"/>
+              </a:ext>
+            </a:extLst>
+          </p:cNvPr>
+          <p:cNvSpPr txBox="1"/>
+          <p:nvPr/>
+        </p:nvSpPr>
+        <p:spPr>
+          <a:xfrm>
+            <a:off x="4760128" y="3009014"/>
+            <a:ext cx="7349469" cy="2031325"/>
+          </a:xfrm>
+          <a:prstGeom prst="rect">
+            <a:avLst/>
+          </a:prstGeom>
+          <a:noFill/>
+        </p:spPr>
+        <p:txBody>
+          <a:bodyPr wrap="square" rtlCol="0">
+            <a:spAutoFit/>
+          </a:bodyPr>
+          <a:lstStyle/>
+          <a:p>
+            <a:r>
+              <a:rPr lang="en-CN" dirty="0"/>
+              <a:t>此外</a:t>
+            </a:r>
+            <a:r>
+              <a:rPr lang="zh-CN" altLang="en-US" dirty="0"/>
+              <a:t>，还可使用：</a:t>
+            </a:r>
+            <a:endParaRPr lang="en-US" altLang="zh-CN" dirty="0"/>
+          </a:p>
+          <a:p>
+            <a:endParaRPr lang="en-US" dirty="0"/>
+          </a:p>
+          <a:p>
+            <a:r>
+              <a:rPr lang="en-US" dirty="0" err="1"/>
+              <a:t>tinytex</a:t>
+            </a:r>
+            <a:r>
+              <a:rPr lang="en-US" dirty="0"/>
+              <a:t>::</a:t>
+            </a:r>
+            <a:r>
+              <a:rPr lang="en-US" dirty="0" err="1"/>
+              <a:t>tlmgr_repo</a:t>
+            </a:r>
+            <a:r>
+              <a:rPr lang="en-US" dirty="0"/>
+              <a:t>( " </a:t>
+            </a:r>
+            <a:r>
+              <a:rPr lang="en-US" dirty="0">
+                <a:hlinkClick r:id="rId3"/>
+              </a:rPr>
+              <a:t>https://ctan.math.illinois.edu/systems/texlive/tlnet</a:t>
+            </a:r>
+            <a:r>
+              <a:rPr lang="en-US" dirty="0"/>
+              <a:t> " ) </a:t>
+            </a:r>
+          </a:p>
+          <a:p>
+            <a:endParaRPr lang="en-CN" dirty="0"/>
+          </a:p>
+          <a:p>
+            <a:r>
+              <a:rPr lang="en-CN" dirty="0"/>
+              <a:t>改变</a:t>
+            </a:r>
+            <a:r>
+              <a:rPr lang="zh-CN" altLang="en-US" dirty="0"/>
+              <a:t> </a:t>
+            </a:r>
+            <a:r>
+              <a:rPr lang="en-US" altLang="zh-CN" dirty="0" err="1"/>
+              <a:t>tex</a:t>
+            </a:r>
+            <a:r>
+              <a:rPr lang="zh-CN" altLang="en-US" dirty="0"/>
+              <a:t> 的 </a:t>
+            </a:r>
+            <a:r>
+              <a:rPr lang="en-US" altLang="zh-CN" dirty="0"/>
+              <a:t>repo</a:t>
+            </a:r>
+          </a:p>
+          <a:p>
+            <a:endParaRPr lang="en-US" dirty="0"/>
+          </a:p>
+          <a:p>
+            <a:r>
+              <a:rPr lang="en-US" dirty="0" err="1"/>
+              <a:t>用</a:t>
+            </a:r>
+            <a:r>
+              <a:rPr lang="zh-CN" altLang="en-US" dirty="0"/>
+              <a:t> </a:t>
+            </a:r>
+            <a:r>
+              <a:rPr lang="en-US" dirty="0" err="1"/>
+              <a:t>tinytex</a:t>
+            </a:r>
+            <a:r>
+              <a:rPr lang="en-US" dirty="0"/>
+              <a:t>:::</a:t>
+            </a:r>
+            <a:r>
+              <a:rPr lang="en-US" dirty="0" err="1"/>
+              <a:t>ctan_mirrors</a:t>
+            </a:r>
+            <a:r>
+              <a:rPr lang="en-US" dirty="0"/>
+              <a:t>()</a:t>
+            </a:r>
+            <a:r>
+              <a:rPr lang="zh-CN" altLang="en-US" dirty="0"/>
+              <a:t> 显示当前可用的 </a:t>
+            </a:r>
+            <a:r>
+              <a:rPr lang="en-US" altLang="zh-CN" dirty="0"/>
+              <a:t>mirrors</a:t>
+            </a:r>
+            <a:endParaRPr lang="en-CN" dirty="0"/>
+          </a:p>
+        </p:txBody>
+      </p:sp>
+    </p:spTree>
+    <p:extLst>
+      <p:ext uri="{BB962C8B-B14F-4D97-AF65-F5344CB8AC3E}">
+        <p14:creationId xmlns:p14="http://schemas.microsoft.com/office/powerpoint/2010/main" val="873221246"/>
+      </p:ext>
+    </p:extLst>
+  </p:cSld>
+  <p:clrMapOvr>
+    <a:masterClrMapping/>
+  </p:clrMapOvr>
+</p:sld>
+</file>
+
+<file path=ppt/slides/slide3.xml><?xml version="1.0" encoding="utf-8"?>
+<p:sld xmlns:a="http://schemas.openxmlformats.org/drawingml/2006/main" xmlns:r="http://schemas.openxmlformats.org/officeDocument/2006/relationships" xmlns:p="http://schemas.openxmlformats.org/presentationml/2006/main">
+  <p:cSld>
+    <p:spTree>
+      <p:nvGrpSpPr>
+        <p:cNvPr id="1" name=""/>
+        <p:cNvGrpSpPr/>
+        <p:nvPr/>
+      </p:nvGrpSpPr>
+      <p:grpSpPr>
+        <a:xfrm>
+          <a:off x="0" y="0"/>
+          <a:ext cx="0" cy="0"/>
+          <a:chOff x="0" y="0"/>
+          <a:chExt cx="0" cy="0"/>
+        </a:xfrm>
+      </p:grpSpPr>
       <p:grpSp>
         <p:nvGrpSpPr>
           <p:cNvPr id="4" name="Group 3">
@@ -3911,7 +4255,7 @@
 </p:sld>
 </file>
 
-<file path=ppt/slides/slide3.xml><?xml version="1.0" encoding="utf-8"?>
+<file path=ppt/slides/slide4.xml><?xml version="1.0" encoding="utf-8"?>
 <p:sld xmlns:a="http://schemas.openxmlformats.org/drawingml/2006/main" xmlns:r="http://schemas.openxmlformats.org/officeDocument/2006/relationships" xmlns:p="http://schemas.openxmlformats.org/presentationml/2006/main">
   <p:cSld>
     <p:spTree>
